--- a/examples/comic_analysis_getting_started.pptx
+++ b/examples/comic_analysis_getting_started.pptx
@@ -1,8 +1,8 @@
 
 <file path=ppt/presentation.xml><?xml version="1.0" encoding="utf-8"?>
-<p:presentation xmlns:p="http://schemas.openxmlformats.org/presentationml/2006/main" xmlns:r="http://schemas.openxmlformats.org/officeDocument/2006/relationships">
+<p:presentation xmlns:a="http://schemas.openxmlformats.org/drawingml/2006/main" xmlns:p="http://schemas.openxmlformats.org/presentationml/2006/main" xmlns:r="http://schemas.openxmlformats.org/officeDocument/2006/relationships" saveSubsetFonts="1" autoCompressPictures="0">
   <p:sldMasterIdLst>
-    <p:sldMasterId r:id="rId1" id="2147483648"/>
+    <p:sldMasterId id="2147483648" r:id="rId1"/>
   </p:sldMasterIdLst>
   <p:sldIdLst>
     <p:sldId id="257" r:id="rId2"/>
@@ -12,8 +12,103 @@
     <p:sldId id="261" r:id="rId6"/>
     <p:sldId id="262" r:id="rId7"/>
   </p:sldIdLst>
-  <p:sldSz cx="9144000" cy="6858000"/>
+  <p:sldSz cx="9144000" cy="6858000" type="screen4x3"/>
   <p:notesSz cx="9144000" cy="6858000"/>
+  <p:defaultTextStyle>
+    <a:defPPr>
+      <a:defRPr lang="en-US"/>
+    </a:defPPr>
+    <a:lvl1pPr marL="0" algn="l" defTabSz="457200" rtl="0" eaLnBrk="1" latinLnBrk="0" hangingPunct="1">
+      <a:defRPr sz="1800" kern="1200">
+        <a:solidFill>
+          <a:schemeClr val="tx1"/>
+        </a:solidFill>
+        <a:latin typeface="+mn-lt"/>
+        <a:ea typeface="+mn-ea"/>
+        <a:cs typeface="+mn-cs"/>
+      </a:defRPr>
+    </a:lvl1pPr>
+    <a:lvl2pPr marL="457200" algn="l" defTabSz="457200" rtl="0" eaLnBrk="1" latinLnBrk="0" hangingPunct="1">
+      <a:defRPr sz="1800" kern="1200">
+        <a:solidFill>
+          <a:schemeClr val="tx1"/>
+        </a:solidFill>
+        <a:latin typeface="+mn-lt"/>
+        <a:ea typeface="+mn-ea"/>
+        <a:cs typeface="+mn-cs"/>
+      </a:defRPr>
+    </a:lvl2pPr>
+    <a:lvl3pPr marL="914400" algn="l" defTabSz="457200" rtl="0" eaLnBrk="1" latinLnBrk="0" hangingPunct="1">
+      <a:defRPr sz="1800" kern="1200">
+        <a:solidFill>
+          <a:schemeClr val="tx1"/>
+        </a:solidFill>
+        <a:latin typeface="+mn-lt"/>
+        <a:ea typeface="+mn-ea"/>
+        <a:cs typeface="+mn-cs"/>
+      </a:defRPr>
+    </a:lvl3pPr>
+    <a:lvl4pPr marL="1371600" algn="l" defTabSz="457200" rtl="0" eaLnBrk="1" latinLnBrk="0" hangingPunct="1">
+      <a:defRPr sz="1800" kern="1200">
+        <a:solidFill>
+          <a:schemeClr val="tx1"/>
+        </a:solidFill>
+        <a:latin typeface="+mn-lt"/>
+        <a:ea typeface="+mn-ea"/>
+        <a:cs typeface="+mn-cs"/>
+      </a:defRPr>
+    </a:lvl4pPr>
+    <a:lvl5pPr marL="1828800" algn="l" defTabSz="457200" rtl="0" eaLnBrk="1" latinLnBrk="0" hangingPunct="1">
+      <a:defRPr sz="1800" kern="1200">
+        <a:solidFill>
+          <a:schemeClr val="tx1"/>
+        </a:solidFill>
+        <a:latin typeface="+mn-lt"/>
+        <a:ea typeface="+mn-ea"/>
+        <a:cs typeface="+mn-cs"/>
+      </a:defRPr>
+    </a:lvl5pPr>
+    <a:lvl6pPr marL="2286000" algn="l" defTabSz="457200" rtl="0" eaLnBrk="1" latinLnBrk="0" hangingPunct="1">
+      <a:defRPr sz="1800" kern="1200">
+        <a:solidFill>
+          <a:schemeClr val="tx1"/>
+        </a:solidFill>
+        <a:latin typeface="+mn-lt"/>
+        <a:ea typeface="+mn-ea"/>
+        <a:cs typeface="+mn-cs"/>
+      </a:defRPr>
+    </a:lvl6pPr>
+    <a:lvl7pPr marL="2743200" algn="l" defTabSz="457200" rtl="0" eaLnBrk="1" latinLnBrk="0" hangingPunct="1">
+      <a:defRPr sz="1800" kern="1200">
+        <a:solidFill>
+          <a:schemeClr val="tx1"/>
+        </a:solidFill>
+        <a:latin typeface="+mn-lt"/>
+        <a:ea typeface="+mn-ea"/>
+        <a:cs typeface="+mn-cs"/>
+      </a:defRPr>
+    </a:lvl7pPr>
+    <a:lvl8pPr marL="3200400" algn="l" defTabSz="457200" rtl="0" eaLnBrk="1" latinLnBrk="0" hangingPunct="1">
+      <a:defRPr sz="1800" kern="1200">
+        <a:solidFill>
+          <a:schemeClr val="tx1"/>
+        </a:solidFill>
+        <a:latin typeface="+mn-lt"/>
+        <a:ea typeface="+mn-ea"/>
+        <a:cs typeface="+mn-cs"/>
+      </a:defRPr>
+    </a:lvl8pPr>
+    <a:lvl9pPr marL="3657600" algn="l" defTabSz="457200" rtl="0" eaLnBrk="1" latinLnBrk="0" hangingPunct="1">
+      <a:defRPr sz="1800" kern="1200">
+        <a:solidFill>
+          <a:schemeClr val="tx1"/>
+        </a:solidFill>
+        <a:latin typeface="+mn-lt"/>
+        <a:ea typeface="+mn-ea"/>
+        <a:cs typeface="+mn-cs"/>
+      </a:defRPr>
+    </a:lvl9pPr>
+  </p:defaultTextStyle>
 </p:presentation>
 </file>
 

--- a/examples/comic_analysis_getting_started.pptx
+++ b/examples/comic_analysis_getting_started.pptx
@@ -11,8 +11,6 @@
     <p:sldId r:id="rId5" id="259"/>
     <p:sldId r:id="rId6" id="260"/>
     <p:sldId r:id="rId7" id="261"/>
-    <p:sldId r:id="rId8" id="262"/>
-    <p:sldId r:id="rId9" id="263"/>
   </p:sldIdLst>
   <p:sldSz cx="9144000" cy="6858000" type="screen4x3"/>
   <p:notesSz cx="6858000" cy="9144000"/>
@@ -844,7 +842,7 @@
           <a:p>
             <a:r>
               <a:rPr lang="en-US" dirty="0"/>
-              <a:t>Comic Analysis</a:t>
+              <a:t>Getting Started with Comic Analysis</a:t>
             </a:r>
             <a:endParaRPr lang="en-US"/>
           </a:p>
@@ -867,7 +865,7 @@
           <a:p>
             <a:r>
               <a:rPr lang="en-US" dirty="0"/>
-              <a:t>Getting Started Guide</a:t>
+              <a:t>Guide for New Users</a:t>
             </a:r>
             <a:endParaRPr lang="en-US"/>
           </a:p>
@@ -915,7 +913,7 @@
           <a:p>
             <a:r>
               <a:rPr lang="en-US" dirty="0"/>
-              <a:t>Prerequisites</a:t>
+              <a:t>Welcome</a:t>
             </a:r>
             <a:endParaRPr lang="en-US"/>
           </a:p>
@@ -938,28 +936,35 @@
           <a:p>
             <a:r>
               <a:rPr lang="en-US" dirty="0"/>
-              <a:t>Python 3.8+</a:t>
-            </a:r>
-            <a:endParaRPr lang="en-US"/>
-          </a:p>
-          <a:p>
-            <a:r>
-              <a:rPr lang="en-US" dirty="0"/>
-              <a:t>pip or conda</a:t>
-            </a:r>
-            <a:endParaRPr lang="en-US"/>
-          </a:p>
-          <a:p>
-            <a:r>
-              <a:rPr lang="en-US" dirty="0"/>
-              <a:t>GPU (recommended)</a:t>
-            </a:r>
-            <a:endParaRPr lang="en-US"/>
-          </a:p>
-          <a:p>
-            <a:r>
-              <a:rPr lang="en-US" dirty="0"/>
-              <a:t>Basic ML knowledge</a:t>
+              <a:t>Open-source comic book analysis project</a:t>
+            </a:r>
+            <a:endParaRPr lang="en-US"/>
+          </a:p>
+          <a:p>
+            <a:r>
+              <a:rPr lang="en-US" dirty="0"/>
+              <a:t>Accessible to researchers and enthusiasts</a:t>
+            </a:r>
+            <a:endParaRPr lang="en-US"/>
+          </a:p>
+          <a:p>
+            <a:r>
+              <a:rPr lang="en-US" dirty="0"/>
+              <a:t>Well-documented with examples</a:t>
+            </a:r>
+            <a:endParaRPr lang="en-US"/>
+          </a:p>
+          <a:p>
+            <a:r>
+              <a:rPr lang="en-US" dirty="0"/>
+              <a:t>Active community support</a:t>
+            </a:r>
+            <a:endParaRPr lang="en-US"/>
+          </a:p>
+          <a:p>
+            <a:r>
+              <a:rPr lang="en-US" dirty="0"/>
+              <a:t>Continuous development</a:t>
             </a:r>
             <a:endParaRPr lang="en-US"/>
           </a:p>
@@ -1007,7 +1012,7 @@
           <a:p>
             <a:r>
               <a:rPr lang="en-US" dirty="0"/>
-              <a:t>Installation</a:t>
+              <a:t>Prerequisites</a:t>
             </a:r>
             <a:endParaRPr lang="en-US"/>
           </a:p>
@@ -1030,28 +1035,35 @@
           <a:p>
             <a:r>
               <a:rPr lang="en-US" dirty="0"/>
-              <a:t>Clone repository</a:t>
-            </a:r>
-            <a:endParaRPr lang="en-US"/>
-          </a:p>
-          <a:p>
-            <a:r>
-              <a:rPr lang="en-US" dirty="0"/>
-              <a:t>Install dependencies</a:t>
-            </a:r>
-            <a:endParaRPr lang="en-US"/>
-          </a:p>
-          <a:p>
-            <a:r>
-              <a:rPr lang="en-US" dirty="0"/>
-              <a:t>Download pre-trained models</a:t>
-            </a:r>
-            <a:endParaRPr lang="en-US"/>
-          </a:p>
-          <a:p>
-            <a:r>
-              <a:rPr lang="en-US" dirty="0"/>
-              <a:t>Setup configuration</a:t>
+              <a:t>Python 3.7 or higher installed</a:t>
+            </a:r>
+            <a:endParaRPr lang="en-US"/>
+          </a:p>
+          <a:p>
+            <a:r>
+              <a:rPr lang="en-US" dirty="0"/>
+              <a:t>Basic Python programming knowledge</a:t>
+            </a:r>
+            <a:endParaRPr lang="en-US"/>
+          </a:p>
+          <a:p>
+            <a:r>
+              <a:rPr lang="en-US" dirty="0"/>
+              <a:t>Jupyter notebooks familiarity (helpful)</a:t>
+            </a:r>
+            <a:endParaRPr lang="en-US"/>
+          </a:p>
+          <a:p>
+            <a:r>
+              <a:rPr lang="en-US" dirty="0"/>
+              <a:t>Basic ML concepts (optional)</a:t>
+            </a:r>
+            <a:endParaRPr lang="en-US"/>
+          </a:p>
+          <a:p>
+            <a:r>
+              <a:rPr lang="en-US" dirty="0"/>
+              <a:t>Git for cloning repository</a:t>
             </a:r>
             <a:endParaRPr lang="en-US"/>
           </a:p>
@@ -1099,7 +1111,7 @@
           <a:p>
             <a:r>
               <a:rPr lang="en-US" dirty="0"/>
-              <a:t>Quick Start</a:t>
+              <a:t>Installation Steps</a:t>
             </a:r>
             <a:endParaRPr lang="en-US"/>
           </a:p>
@@ -1122,28 +1134,35 @@
           <a:p>
             <a:r>
               <a:rPr lang="en-US" dirty="0"/>
-              <a:t>Prepare comic images</a:t>
-            </a:r>
-            <a:endParaRPr lang="en-US"/>
-          </a:p>
-          <a:p>
-            <a:r>
-              <a:rPr lang="en-US" dirty="0"/>
-              <a:t>Run preprocessing</a:t>
-            </a:r>
-            <a:endParaRPr lang="en-US"/>
-          </a:p>
-          <a:p>
-            <a:r>
-              <a:rPr lang="en-US" dirty="0"/>
-              <a:t>Execute analysis</a:t>
-            </a:r>
-            <a:endParaRPr lang="en-US"/>
-          </a:p>
-          <a:p>
-            <a:r>
-              <a:rPr lang="en-US" dirty="0"/>
-              <a:t>View results</a:t>
+              <a:t>1. Clone repository from GitHub</a:t>
+            </a:r>
+            <a:endParaRPr lang="en-US"/>
+          </a:p>
+          <a:p>
+            <a:r>
+              <a:rPr lang="en-US" dirty="0"/>
+              <a:t>2. Create virtual environment</a:t>
+            </a:r>
+            <a:endParaRPr lang="en-US"/>
+          </a:p>
+          <a:p>
+            <a:r>
+              <a:rPr lang="en-US" dirty="0"/>
+              <a:t>3. Install required dependencies</a:t>
+            </a:r>
+            <a:endParaRPr lang="en-US"/>
+          </a:p>
+          <a:p>
+            <a:r>
+              <a:rPr lang="en-US" dirty="0"/>
+              <a:t>4. Download pre-trained models</a:t>
+            </a:r>
+            <a:endParaRPr lang="en-US"/>
+          </a:p>
+          <a:p>
+            <a:r>
+              <a:rPr lang="en-US" dirty="0"/>
+              <a:t>5. Verify with test scripts</a:t>
             </a:r>
             <a:endParaRPr lang="en-US"/>
           </a:p>
@@ -1191,7 +1210,7 @@
           <a:p>
             <a:r>
               <a:rPr lang="en-US" dirty="0"/>
-              <a:t>Example Workflow</a:t>
+              <a:t>Quick Start</a:t>
             </a:r>
             <a:endParaRPr lang="en-US"/>
           </a:p>
@@ -1214,35 +1233,35 @@
           <a:p>
             <a:r>
               <a:rPr lang="en-US" dirty="0"/>
-              <a:t>1. Load comic images</a:t>
-            </a:r>
-            <a:endParaRPr lang="en-US"/>
-          </a:p>
-          <a:p>
-            <a:r>
-              <a:rPr lang="en-US" dirty="0"/>
-              <a:t>2. Detect panels</a:t>
-            </a:r>
-            <a:endParaRPr lang="en-US"/>
-          </a:p>
-          <a:p>
-            <a:r>
-              <a:rPr lang="en-US" dirty="0"/>
-              <a:t>3. Extract characters</a:t>
-            </a:r>
-            <a:endParaRPr lang="en-US"/>
-          </a:p>
-          <a:p>
-            <a:r>
-              <a:rPr lang="en-US" dirty="0"/>
-              <a:t>4. Analyze text</a:t>
-            </a:r>
-            <a:endParaRPr lang="en-US"/>
-          </a:p>
-          <a:p>
-            <a:r>
-              <a:rPr lang="en-US" dirty="0"/>
-              <a:t>5. Generate report</a:t>
+              <a:t>Open example notebooks in Jupyter</a:t>
+            </a:r>
+            <a:endParaRPr lang="en-US"/>
+          </a:p>
+          <a:p>
+            <a:r>
+              <a:rPr lang="en-US" dirty="0"/>
+              <a:t>Run basic analysis tutorial</a:t>
+            </a:r>
+            <a:endParaRPr lang="en-US"/>
+          </a:p>
+          <a:p>
+            <a:r>
+              <a:rPr lang="en-US" dirty="0"/>
+              <a:t>Process sample comic image</a:t>
+            </a:r>
+            <a:endParaRPr lang="en-US"/>
+          </a:p>
+          <a:p>
+            <a:r>
+              <a:rPr lang="en-US" dirty="0"/>
+              <a:t>Explore visualization examples</a:t>
+            </a:r>
+            <a:endParaRPr lang="en-US"/>
+          </a:p>
+          <a:p>
+            <a:r>
+              <a:rPr lang="en-US" dirty="0"/>
+              <a:t>Check documentation for details</a:t>
             </a:r>
             <a:endParaRPr lang="en-US"/>
           </a:p>
@@ -1290,7 +1309,7 @@
           <a:p>
             <a:r>
               <a:rPr lang="en-US" dirty="0"/>
-              <a:t>Notebooks</a:t>
+              <a:t>Next Steps</a:t>
             </a:r>
             <a:endParaRPr lang="en-US"/>
           </a:p>
@@ -1313,220 +1332,6 @@
           <a:p>
             <a:r>
               <a:rPr lang="en-US" dirty="0"/>
-              <a:t>01_preprocessing.ipynb</a:t>
-            </a:r>
-            <a:endParaRPr lang="en-US"/>
-          </a:p>
-          <a:p>
-            <a:r>
-              <a:rPr lang="en-US" dirty="0"/>
-              <a:t>02_detection.ipynb</a:t>
-            </a:r>
-            <a:endParaRPr lang="en-US"/>
-          </a:p>
-          <a:p>
-            <a:r>
-              <a:rPr lang="en-US" dirty="0"/>
-              <a:t>03_analysis.ipynb</a:t>
-            </a:r>
-            <a:endParaRPr lang="en-US"/>
-          </a:p>
-          <a:p>
-            <a:r>
-              <a:rPr lang="en-US" dirty="0"/>
-              <a:t>04_visualization.ipynb</a:t>
-            </a:r>
-            <a:endParaRPr lang="en-US"/>
-          </a:p>
-        </p:txBody>
-      </p:sp>
-    </p:spTree>
-  </p:cSld>
-  <p:clrMapOvr>
-    <a:masterClrMapping/>
-  </p:clrMapOvr>
-</p:sld>
-</file>
-
-<file path=ppt/slides/slide7.xml><?xml version="1.0" encoding="utf-8"?>
-<p:sld xmlns:a="http://schemas.openxmlformats.org/drawingml/2006/main" xmlns:p="http://schemas.openxmlformats.org/presentationml/2006/main">
-  <p:cSld>
-    <p:spTree>
-      <p:nvGrpSpPr>
-        <p:cNvPr id="1" name=""/>
-        <p:cNvGrpSpPr/>
-        <p:nvPr/>
-      </p:nvGrpSpPr>
-      <p:grpSpPr>
-        <a:xfrm>
-          <a:off x="0" y="0"/>
-          <a:ext cx="0" cy="0"/>
-          <a:chOff x="0" y="0"/>
-          <a:chExt cx="0" cy="0"/>
-        </a:xfrm>
-      </p:grpSpPr>
-      <p:sp>
-        <p:nvSpPr>
-          <p:cNvPr id="2" name="Title 1"/>
-          <p:cNvSpPr>
-            <a:spLocks noGrp="1"/>
-          </p:cNvSpPr>
-          <p:nvPr>
-            <p:ph type="title"/>
-          </p:nvPr>
-        </p:nvSpPr>
-        <p:spPr/>
-        <p:txBody>
-          <a:bodyPr/>
-          <a:lstStyle/>
-          <a:p>
-            <a:r>
-              <a:rPr lang="en-US" dirty="0"/>
-              <a:t>Resources</a:t>
-            </a:r>
-            <a:endParaRPr lang="en-US"/>
-          </a:p>
-        </p:txBody>
-      </p:sp>
-      <p:sp>
-        <p:nvSpPr>
-          <p:cNvPr id="3" name="Content Placeholder 2"/>
-          <p:cNvSpPr>
-            <a:spLocks noGrp="1"/>
-          </p:cNvSpPr>
-          <p:nvPr>
-            <p:ph type="body" idx="1"/>
-          </p:nvPr>
-        </p:nvSpPr>
-        <p:spPr/>
-        <p:txBody>
-          <a:bodyPr/>
-          <a:lstStyle/>
-          <a:p>
-            <a:r>
-              <a:rPr lang="en-US" dirty="0"/>
-              <a:t>Documentation</a:t>
-            </a:r>
-            <a:endParaRPr lang="en-US"/>
-          </a:p>
-          <a:p>
-            <a:r>
-              <a:rPr lang="en-US" dirty="0"/>
-              <a:t>API Reference</a:t>
-            </a:r>
-            <a:endParaRPr lang="en-US"/>
-          </a:p>
-          <a:p>
-            <a:r>
-              <a:rPr lang="en-US" dirty="0"/>
-              <a:t>Tutorials</a:t>
-            </a:r>
-            <a:endParaRPr lang="en-US"/>
-          </a:p>
-        </p:txBody>
-      </p:sp>
-      <p:sp>
-        <p:nvSpPr>
-          <p:cNvPr id="4" name="Content Placeholder 3"/>
-          <p:cNvSpPr>
-            <a:spLocks noGrp="1"/>
-          </p:cNvSpPr>
-          <p:nvPr>
-            <p:ph type="body" idx="2"/>
-          </p:nvPr>
-        </p:nvSpPr>
-        <p:spPr/>
-        <p:txBody>
-          <a:bodyPr/>
-          <a:lstStyle/>
-          <a:p>
-            <a:r>
-              <a:rPr lang="en-US" dirty="0"/>
-              <a:t>GitHub repo</a:t>
-            </a:r>
-            <a:endParaRPr lang="en-US"/>
-          </a:p>
-          <a:p>
-            <a:r>
-              <a:rPr lang="en-US" dirty="0"/>
-              <a:t>Community forum</a:t>
-            </a:r>
-            <a:endParaRPr lang="en-US"/>
-          </a:p>
-          <a:p>
-            <a:r>
-              <a:rPr lang="en-US" dirty="0"/>
-              <a:t>Research papers</a:t>
-            </a:r>
-            <a:endParaRPr lang="en-US"/>
-          </a:p>
-        </p:txBody>
-      </p:sp>
-    </p:spTree>
-  </p:cSld>
-  <p:clrMapOvr>
-    <a:masterClrMapping/>
-  </p:clrMapOvr>
-</p:sld>
-</file>
-
-<file path=ppt/slides/slide8.xml><?xml version="1.0" encoding="utf-8"?>
-<p:sld xmlns:a="http://schemas.openxmlformats.org/drawingml/2006/main" xmlns:p="http://schemas.openxmlformats.org/presentationml/2006/main">
-  <p:cSld>
-    <p:spTree>
-      <p:nvGrpSpPr>
-        <p:cNvPr id="1" name=""/>
-        <p:cNvGrpSpPr/>
-        <p:nvPr/>
-      </p:nvGrpSpPr>
-      <p:grpSpPr>
-        <a:xfrm>
-          <a:off x="0" y="0"/>
-          <a:ext cx="0" cy="0"/>
-          <a:chOff x="0" y="0"/>
-          <a:chExt cx="0" cy="0"/>
-        </a:xfrm>
-      </p:grpSpPr>
-      <p:sp>
-        <p:nvSpPr>
-          <p:cNvPr id="2" name="Title 1"/>
-          <p:cNvSpPr>
-            <a:spLocks noGrp="1"/>
-          </p:cNvSpPr>
-          <p:nvPr>
-            <p:ph type="title"/>
-          </p:nvPr>
-        </p:nvSpPr>
-        <p:spPr/>
-        <p:txBody>
-          <a:bodyPr/>
-          <a:lstStyle/>
-          <a:p>
-            <a:r>
-              <a:rPr lang="en-US" dirty="0"/>
-              <a:t>Next Steps</a:t>
-            </a:r>
-            <a:endParaRPr lang="en-US"/>
-          </a:p>
-        </p:txBody>
-      </p:sp>
-      <p:sp>
-        <p:nvSpPr>
-          <p:cNvPr id="3" name="Content Placeholder 2"/>
-          <p:cNvSpPr>
-            <a:spLocks noGrp="1"/>
-          </p:cNvSpPr>
-          <p:nvPr>
-            <p:ph type="body" idx="1"/>
-          </p:nvPr>
-        </p:nvSpPr>
-        <p:spPr/>
-        <p:txBody>
-          <a:bodyPr/>
-          <a:lstStyle/>
-          <a:p>
-            <a:r>
-              <a:rPr lang="en-US" dirty="0"/>
               <a:t>Explore example notebooks</a:t>
             </a:r>
             <a:endParaRPr lang="en-US"/>
@@ -1534,21 +1339,28 @@
           <a:p>
             <a:r>
               <a:rPr lang="en-US" dirty="0"/>
-              <a:t>Customize for your data</a:t>
-            </a:r>
-            <a:endParaRPr lang="en-US"/>
-          </a:p>
-          <a:p>
-            <a:r>
-              <a:rPr lang="en-US" dirty="0"/>
-              <a:t>Join the community</a:t>
-            </a:r>
-            <a:endParaRPr lang="en-US"/>
-          </a:p>
-          <a:p>
-            <a:r>
-              <a:rPr lang="en-US" dirty="0"/>
-              <a:t>Contribute improvements</a:t>
+              <a:t>Analyze your own comic images</a:t>
+            </a:r>
+            <a:endParaRPr lang="en-US"/>
+          </a:p>
+          <a:p>
+            <a:r>
+              <a:rPr lang="en-US" dirty="0"/>
+              <a:t>Experiment with parameters</a:t>
+            </a:r>
+            <a:endParaRPr lang="en-US"/>
+          </a:p>
+          <a:p>
+            <a:r>
+              <a:rPr lang="en-US" dirty="0"/>
+              <a:t>Contribute to the project</a:t>
+            </a:r>
+            <a:endParaRPr lang="en-US"/>
+          </a:p>
+          <a:p>
+            <a:r>
+              <a:rPr lang="en-US" dirty="0"/>
+              <a:t>Share findings with community</a:t>
             </a:r>
             <a:endParaRPr lang="en-US"/>
           </a:p>

--- a/examples/comic_analysis_getting_started.pptx
+++ b/examples/comic_analysis_getting_started.pptx
@@ -809,7 +809,7 @@
 </file>
 
 <file path=ppt/slides/slide1.xml><?xml version="1.0" encoding="utf-8"?>
-<p:sld xmlns:a="http://schemas.openxmlformats.org/drawingml/2006/main" xmlns:p="http://schemas.openxmlformats.org/presentationml/2006/main">
+<p:sld xmlns:a="http://schemas.openxmlformats.org/drawingml/2006/main" xmlns:p="http://schemas.openxmlformats.org/presentationml/2006/main" xmlns:r="http://schemas.openxmlformats.org/officeDocument/2006/relationships">
   <p:cSld>
     <p:spTree>
       <p:nvGrpSpPr>
@@ -817,14 +817,7 @@
         <p:cNvGrpSpPr/>
         <p:nvPr/>
       </p:nvGrpSpPr>
-      <p:grpSpPr>
-        <a:xfrm>
-          <a:off x="0" y="0"/>
-          <a:ext cx="0" cy="0"/>
-          <a:chOff x="0" y="0"/>
-          <a:chExt cx="0" cy="0"/>
-        </a:xfrm>
-      </p:grpSpPr>
+      <p:grpSpPr/>
       <p:sp>
         <p:nvSpPr>
           <p:cNvPr id="2" name="Title 1"/>
@@ -841,10 +834,8 @@
           <a:lstStyle/>
           <a:p>
             <a:r>
-              <a:rPr lang="en-US" dirty="0"/>
               <a:t>Getting Started with Comic Analysis</a:t>
             </a:r>
-            <a:endParaRPr lang="en-US"/>
           </a:p>
         </p:txBody>
       </p:sp>
@@ -864,10 +855,8 @@
           <a:lstStyle/>
           <a:p>
             <a:r>
-              <a:rPr lang="en-US" dirty="0"/>
               <a:t>Guide for New Users</a:t>
             </a:r>
-            <a:endParaRPr lang="en-US"/>
           </a:p>
         </p:txBody>
       </p:sp>
@@ -880,7 +869,7 @@
 </file>
 
 <file path=ppt/slides/slide2.xml><?xml version="1.0" encoding="utf-8"?>
-<p:sld xmlns:a="http://schemas.openxmlformats.org/drawingml/2006/main" xmlns:p="http://schemas.openxmlformats.org/presentationml/2006/main">
+<p:sld xmlns:a="http://schemas.openxmlformats.org/drawingml/2006/main" xmlns:p="http://schemas.openxmlformats.org/presentationml/2006/main" xmlns:r="http://schemas.openxmlformats.org/officeDocument/2006/relationships">
   <p:cSld>
     <p:spTree>
       <p:nvGrpSpPr>
@@ -888,14 +877,7 @@
         <p:cNvGrpSpPr/>
         <p:nvPr/>
       </p:nvGrpSpPr>
-      <p:grpSpPr>
-        <a:xfrm>
-          <a:off x="0" y="0"/>
-          <a:ext cx="0" cy="0"/>
-          <a:chOff x="0" y="0"/>
-          <a:chExt cx="0" cy="0"/>
-        </a:xfrm>
-      </p:grpSpPr>
+      <p:grpSpPr/>
       <p:sp>
         <p:nvSpPr>
           <p:cNvPr id="2" name="Title 1"/>
@@ -912,10 +894,8 @@
           <a:lstStyle/>
           <a:p>
             <a:r>
-              <a:rPr lang="en-US" dirty="0"/>
               <a:t>Welcome</a:t>
             </a:r>
-            <a:endParaRPr lang="en-US"/>
           </a:p>
         </p:txBody>
       </p:sp>
@@ -935,38 +915,28 @@
           <a:lstStyle/>
           <a:p>
             <a:r>
-              <a:rPr lang="en-US" dirty="0"/>
               <a:t>Open-source comic book analysis project</a:t>
             </a:r>
-            <a:endParaRPr lang="en-US"/>
-          </a:p>
-          <a:p>
-            <a:r>
-              <a:rPr lang="en-US" dirty="0"/>
+          </a:p>
+          <a:p>
+            <a:r>
               <a:t>Accessible to researchers and enthusiasts</a:t>
             </a:r>
-            <a:endParaRPr lang="en-US"/>
-          </a:p>
-          <a:p>
-            <a:r>
-              <a:rPr lang="en-US" dirty="0"/>
+          </a:p>
+          <a:p>
+            <a:r>
               <a:t>Well-documented with examples</a:t>
             </a:r>
-            <a:endParaRPr lang="en-US"/>
-          </a:p>
-          <a:p>
-            <a:r>
-              <a:rPr lang="en-US" dirty="0"/>
+          </a:p>
+          <a:p>
+            <a:r>
               <a:t>Active community support</a:t>
             </a:r>
-            <a:endParaRPr lang="en-US"/>
-          </a:p>
-          <a:p>
-            <a:r>
-              <a:rPr lang="en-US" dirty="0"/>
+          </a:p>
+          <a:p>
+            <a:r>
               <a:t>Continuous development</a:t>
             </a:r>
-            <a:endParaRPr lang="en-US"/>
           </a:p>
         </p:txBody>
       </p:sp>
@@ -979,7 +949,7 @@
 </file>
 
 <file path=ppt/slides/slide3.xml><?xml version="1.0" encoding="utf-8"?>
-<p:sld xmlns:a="http://schemas.openxmlformats.org/drawingml/2006/main" xmlns:p="http://schemas.openxmlformats.org/presentationml/2006/main">
+<p:sld xmlns:a="http://schemas.openxmlformats.org/drawingml/2006/main" xmlns:p="http://schemas.openxmlformats.org/presentationml/2006/main" xmlns:r="http://schemas.openxmlformats.org/officeDocument/2006/relationships">
   <p:cSld>
     <p:spTree>
       <p:nvGrpSpPr>
@@ -987,14 +957,7 @@
         <p:cNvGrpSpPr/>
         <p:nvPr/>
       </p:nvGrpSpPr>
-      <p:grpSpPr>
-        <a:xfrm>
-          <a:off x="0" y="0"/>
-          <a:ext cx="0" cy="0"/>
-          <a:chOff x="0" y="0"/>
-          <a:chExt cx="0" cy="0"/>
-        </a:xfrm>
-      </p:grpSpPr>
+      <p:grpSpPr/>
       <p:sp>
         <p:nvSpPr>
           <p:cNvPr id="2" name="Title 1"/>
@@ -1011,10 +974,8 @@
           <a:lstStyle/>
           <a:p>
             <a:r>
-              <a:rPr lang="en-US" dirty="0"/>
               <a:t>Prerequisites</a:t>
             </a:r>
-            <a:endParaRPr lang="en-US"/>
           </a:p>
         </p:txBody>
       </p:sp>
@@ -1034,38 +995,28 @@
           <a:lstStyle/>
           <a:p>
             <a:r>
-              <a:rPr lang="en-US" dirty="0"/>
               <a:t>Python 3.7 or higher installed</a:t>
             </a:r>
-            <a:endParaRPr lang="en-US"/>
-          </a:p>
-          <a:p>
-            <a:r>
-              <a:rPr lang="en-US" dirty="0"/>
+          </a:p>
+          <a:p>
+            <a:r>
               <a:t>Basic Python programming knowledge</a:t>
             </a:r>
-            <a:endParaRPr lang="en-US"/>
-          </a:p>
-          <a:p>
-            <a:r>
-              <a:rPr lang="en-US" dirty="0"/>
+          </a:p>
+          <a:p>
+            <a:r>
               <a:t>Jupyter notebooks familiarity (helpful)</a:t>
             </a:r>
-            <a:endParaRPr lang="en-US"/>
-          </a:p>
-          <a:p>
-            <a:r>
-              <a:rPr lang="en-US" dirty="0"/>
+          </a:p>
+          <a:p>
+            <a:r>
               <a:t>Basic ML concepts (optional)</a:t>
             </a:r>
-            <a:endParaRPr lang="en-US"/>
-          </a:p>
-          <a:p>
-            <a:r>
-              <a:rPr lang="en-US" dirty="0"/>
+          </a:p>
+          <a:p>
+            <a:r>
               <a:t>Git for cloning repository</a:t>
             </a:r>
-            <a:endParaRPr lang="en-US"/>
           </a:p>
         </p:txBody>
       </p:sp>
@@ -1078,7 +1029,7 @@
 </file>
 
 <file path=ppt/slides/slide4.xml><?xml version="1.0" encoding="utf-8"?>
-<p:sld xmlns:a="http://schemas.openxmlformats.org/drawingml/2006/main" xmlns:p="http://schemas.openxmlformats.org/presentationml/2006/main">
+<p:sld xmlns:a="http://schemas.openxmlformats.org/drawingml/2006/main" xmlns:p="http://schemas.openxmlformats.org/presentationml/2006/main" xmlns:r="http://schemas.openxmlformats.org/officeDocument/2006/relationships">
   <p:cSld>
     <p:spTree>
       <p:nvGrpSpPr>
@@ -1086,14 +1037,7 @@
         <p:cNvGrpSpPr/>
         <p:nvPr/>
       </p:nvGrpSpPr>
-      <p:grpSpPr>
-        <a:xfrm>
-          <a:off x="0" y="0"/>
-          <a:ext cx="0" cy="0"/>
-          <a:chOff x="0" y="0"/>
-          <a:chExt cx="0" cy="0"/>
-        </a:xfrm>
-      </p:grpSpPr>
+      <p:grpSpPr/>
       <p:sp>
         <p:nvSpPr>
           <p:cNvPr id="2" name="Title 1"/>
@@ -1110,10 +1054,8 @@
           <a:lstStyle/>
           <a:p>
             <a:r>
-              <a:rPr lang="en-US" dirty="0"/>
               <a:t>Installation Steps</a:t>
             </a:r>
-            <a:endParaRPr lang="en-US"/>
           </a:p>
         </p:txBody>
       </p:sp>
@@ -1133,38 +1075,28 @@
           <a:lstStyle/>
           <a:p>
             <a:r>
-              <a:rPr lang="en-US" dirty="0"/>
               <a:t>1. Clone repository from GitHub</a:t>
             </a:r>
-            <a:endParaRPr lang="en-US"/>
-          </a:p>
-          <a:p>
-            <a:r>
-              <a:rPr lang="en-US" dirty="0"/>
+          </a:p>
+          <a:p>
+            <a:r>
               <a:t>2. Create virtual environment</a:t>
             </a:r>
-            <a:endParaRPr lang="en-US"/>
-          </a:p>
-          <a:p>
-            <a:r>
-              <a:rPr lang="en-US" dirty="0"/>
+          </a:p>
+          <a:p>
+            <a:r>
               <a:t>3. Install required dependencies</a:t>
             </a:r>
-            <a:endParaRPr lang="en-US"/>
-          </a:p>
-          <a:p>
-            <a:r>
-              <a:rPr lang="en-US" dirty="0"/>
+          </a:p>
+          <a:p>
+            <a:r>
               <a:t>4. Download pre-trained models</a:t>
             </a:r>
-            <a:endParaRPr lang="en-US"/>
-          </a:p>
-          <a:p>
-            <a:r>
-              <a:rPr lang="en-US" dirty="0"/>
+          </a:p>
+          <a:p>
+            <a:r>
               <a:t>5. Verify with test scripts</a:t>
             </a:r>
-            <a:endParaRPr lang="en-US"/>
           </a:p>
         </p:txBody>
       </p:sp>
@@ -1177,7 +1109,7 @@
 </file>
 
 <file path=ppt/slides/slide5.xml><?xml version="1.0" encoding="utf-8"?>
-<p:sld xmlns:a="http://schemas.openxmlformats.org/drawingml/2006/main" xmlns:p="http://schemas.openxmlformats.org/presentationml/2006/main">
+<p:sld xmlns:a="http://schemas.openxmlformats.org/drawingml/2006/main" xmlns:p="http://schemas.openxmlformats.org/presentationml/2006/main" xmlns:r="http://schemas.openxmlformats.org/officeDocument/2006/relationships">
   <p:cSld>
     <p:spTree>
       <p:nvGrpSpPr>
@@ -1185,14 +1117,7 @@
         <p:cNvGrpSpPr/>
         <p:nvPr/>
       </p:nvGrpSpPr>
-      <p:grpSpPr>
-        <a:xfrm>
-          <a:off x="0" y="0"/>
-          <a:ext cx="0" cy="0"/>
-          <a:chOff x="0" y="0"/>
-          <a:chExt cx="0" cy="0"/>
-        </a:xfrm>
-      </p:grpSpPr>
+      <p:grpSpPr/>
       <p:sp>
         <p:nvSpPr>
           <p:cNvPr id="2" name="Title 1"/>
@@ -1209,10 +1134,8 @@
           <a:lstStyle/>
           <a:p>
             <a:r>
-              <a:rPr lang="en-US" dirty="0"/>
               <a:t>Quick Start</a:t>
             </a:r>
-            <a:endParaRPr lang="en-US"/>
           </a:p>
         </p:txBody>
       </p:sp>
@@ -1232,38 +1155,28 @@
           <a:lstStyle/>
           <a:p>
             <a:r>
-              <a:rPr lang="en-US" dirty="0"/>
               <a:t>Open example notebooks in Jupyter</a:t>
             </a:r>
-            <a:endParaRPr lang="en-US"/>
-          </a:p>
-          <a:p>
-            <a:r>
-              <a:rPr lang="en-US" dirty="0"/>
+          </a:p>
+          <a:p>
+            <a:r>
               <a:t>Run basic analysis tutorial</a:t>
             </a:r>
-            <a:endParaRPr lang="en-US"/>
-          </a:p>
-          <a:p>
-            <a:r>
-              <a:rPr lang="en-US" dirty="0"/>
+          </a:p>
+          <a:p>
+            <a:r>
               <a:t>Process sample comic image</a:t>
             </a:r>
-            <a:endParaRPr lang="en-US"/>
-          </a:p>
-          <a:p>
-            <a:r>
-              <a:rPr lang="en-US" dirty="0"/>
+          </a:p>
+          <a:p>
+            <a:r>
               <a:t>Explore visualization examples</a:t>
             </a:r>
-            <a:endParaRPr lang="en-US"/>
-          </a:p>
-          <a:p>
-            <a:r>
-              <a:rPr lang="en-US" dirty="0"/>
+          </a:p>
+          <a:p>
+            <a:r>
               <a:t>Check documentation for details</a:t>
             </a:r>
-            <a:endParaRPr lang="en-US"/>
           </a:p>
         </p:txBody>
       </p:sp>
@@ -1276,7 +1189,7 @@
 </file>
 
 <file path=ppt/slides/slide6.xml><?xml version="1.0" encoding="utf-8"?>
-<p:sld xmlns:a="http://schemas.openxmlformats.org/drawingml/2006/main" xmlns:p="http://schemas.openxmlformats.org/presentationml/2006/main">
+<p:sld xmlns:a="http://schemas.openxmlformats.org/drawingml/2006/main" xmlns:p="http://schemas.openxmlformats.org/presentationml/2006/main" xmlns:r="http://schemas.openxmlformats.org/officeDocument/2006/relationships">
   <p:cSld>
     <p:spTree>
       <p:nvGrpSpPr>
@@ -1284,14 +1197,7 @@
         <p:cNvGrpSpPr/>
         <p:nvPr/>
       </p:nvGrpSpPr>
-      <p:grpSpPr>
-        <a:xfrm>
-          <a:off x="0" y="0"/>
-          <a:ext cx="0" cy="0"/>
-          <a:chOff x="0" y="0"/>
-          <a:chExt cx="0" cy="0"/>
-        </a:xfrm>
-      </p:grpSpPr>
+      <p:grpSpPr/>
       <p:sp>
         <p:nvSpPr>
           <p:cNvPr id="2" name="Title 1"/>
@@ -1308,10 +1214,8 @@
           <a:lstStyle/>
           <a:p>
             <a:r>
-              <a:rPr lang="en-US" dirty="0"/>
               <a:t>Next Steps</a:t>
             </a:r>
-            <a:endParaRPr lang="en-US"/>
           </a:p>
         </p:txBody>
       </p:sp>
@@ -1331,38 +1235,28 @@
           <a:lstStyle/>
           <a:p>
             <a:r>
-              <a:rPr lang="en-US" dirty="0"/>
               <a:t>Explore example notebooks</a:t>
             </a:r>
-            <a:endParaRPr lang="en-US"/>
-          </a:p>
-          <a:p>
-            <a:r>
-              <a:rPr lang="en-US" dirty="0"/>
+          </a:p>
+          <a:p>
+            <a:r>
               <a:t>Analyze your own comic images</a:t>
             </a:r>
-            <a:endParaRPr lang="en-US"/>
-          </a:p>
-          <a:p>
-            <a:r>
-              <a:rPr lang="en-US" dirty="0"/>
+          </a:p>
+          <a:p>
+            <a:r>
               <a:t>Experiment with parameters</a:t>
             </a:r>
-            <a:endParaRPr lang="en-US"/>
-          </a:p>
-          <a:p>
-            <a:r>
-              <a:rPr lang="en-US" dirty="0"/>
+          </a:p>
+          <a:p>
+            <a:r>
               <a:t>Contribute to the project</a:t>
             </a:r>
-            <a:endParaRPr lang="en-US"/>
-          </a:p>
-          <a:p>
-            <a:r>
-              <a:rPr lang="en-US" dirty="0"/>
+          </a:p>
+          <a:p>
+            <a:r>
               <a:t>Share findings with community</a:t>
             </a:r>
-            <a:endParaRPr lang="en-US"/>
           </a:p>
         </p:txBody>
       </p:sp>

--- a/examples/comic_analysis_getting_started.pptx
+++ b/examples/comic_analysis_getting_started.pptx
@@ -110,7 +110,7 @@
 </file>
 
 <file path=ppt/slideLayouts/slideLayout1.xml><?xml version="1.0" encoding="utf-8"?>
-<p:sldLayout xmlns:a="http://schemas.openxmlformats.org/drawingml/2006/main" xmlns:p="http://schemas.openxmlformats.org/presentationml/2006/main" type="title" preserve="1">
+<p:sldLayout xmlns:a="http://schemas.openxmlformats.org/drawingml/2006/main" xmlns:r="http://schemas.openxmlformats.org/officeDocument/2006/relationships" xmlns:p="http://schemas.openxmlformats.org/presentationml/2006/main" type="title" preserve="1">
   <p:cSld name="Title Slide">
     <p:spTree>
       <p:nvGrpSpPr>
@@ -136,11 +136,20 @@
             <p:ph type="ctrTitle"/>
           </p:nvPr>
         </p:nvSpPr>
-        <p:spPr/>
-        <p:txBody>
-          <a:bodyPr/>
-          <a:lstStyle/>
-          <a:p>
+        <p:spPr>
+          <a:xfrm>
+            <a:off x="685800" y="2130425"/>
+            <a:ext cx="7772400" cy="1470025"/>
+          </a:xfrm>
+        </p:spPr>
+        <p:txBody>
+          <a:bodyPr/>
+          <a:lstStyle/>
+          <a:p>
+            <a:r>
+              <a:rPr lang="en-US" smtClean="0"/>
+              <a:t>Click to edit Master title style</a:t>
+            </a:r>
             <a:endParaRPr lang="en-US"/>
           </a:p>
         </p:txBody>
@@ -155,11 +164,20 @@
             <p:ph type="subTitle" idx="1"/>
           </p:nvPr>
         </p:nvSpPr>
-        <p:spPr/>
-        <p:txBody>
-          <a:bodyPr/>
-          <a:lstStyle/>
-          <a:p>
+        <p:spPr>
+          <a:xfrm>
+            <a:off x="1371600" y="3886200"/>
+            <a:ext cx="6400800" cy="1752600"/>
+          </a:xfrm>
+        </p:spPr>
+        <p:txBody>
+          <a:bodyPr/>
+          <a:lstStyle/>
+          <a:p>
+            <a:r>
+              <a:rPr lang="en-US" smtClean="0"/>
+              <a:t>Click to edit Master subtitle style</a:t>
+            </a:r>
             <a:endParaRPr lang="en-US"/>
           </a:p>
         </p:txBody>
@@ -170,7 +188,7 @@
 </file>
 
 <file path=ppt/slideLayouts/slideLayout10.xml><?xml version="1.0" encoding="utf-8"?>
-<p:sldLayout xmlns:a="http://schemas.openxmlformats.org/drawingml/2006/main" xmlns:p="http://schemas.openxmlformats.org/presentationml/2006/main" type="vertTx" preserve="1">
+<p:sldLayout xmlns:a="http://schemas.openxmlformats.org/drawingml/2006/main" xmlns:r="http://schemas.openxmlformats.org/officeDocument/2006/relationships" xmlns:p="http://schemas.openxmlformats.org/presentationml/2006/main" type="vertTx" preserve="1">
   <p:cSld name="Title and Vertical Text">
     <p:spTree>
       <p:nvGrpSpPr>
@@ -196,11 +214,20 @@
             <p:ph type="title"/>
           </p:nvPr>
         </p:nvSpPr>
-        <p:spPr/>
-        <p:txBody>
-          <a:bodyPr/>
-          <a:lstStyle/>
-          <a:p>
+        <p:spPr>
+          <a:xfrm>
+            <a:off x="685800" y="2130425"/>
+            <a:ext cx="7772400" cy="1470025"/>
+          </a:xfrm>
+        </p:spPr>
+        <p:txBody>
+          <a:bodyPr/>
+          <a:lstStyle/>
+          <a:p>
+            <a:r>
+              <a:rPr lang="en-US" smtClean="0"/>
+              <a:t>Click to edit Master title style</a:t>
+            </a:r>
             <a:endParaRPr lang="en-US"/>
           </a:p>
         </p:txBody>
@@ -215,11 +242,20 @@
             <p:ph type="body" idx="1"/>
           </p:nvPr>
         </p:nvSpPr>
-        <p:spPr/>
-        <p:txBody>
-          <a:bodyPr/>
-          <a:lstStyle/>
-          <a:p>
+        <p:spPr>
+          <a:xfrm>
+            <a:off x="457200" y="1600200"/>
+            <a:ext cx="8229600" cy="4525963"/>
+          </a:xfrm>
+        </p:spPr>
+        <p:txBody>
+          <a:bodyPr/>
+          <a:lstStyle/>
+          <a:p>
+            <a:r>
+              <a:rPr lang="en-US" smtClean="0"/>
+              <a:t>Click to edit Master text styles</a:t>
+            </a:r>
             <a:endParaRPr lang="en-US"/>
           </a:p>
         </p:txBody>
@@ -230,7 +266,7 @@
 </file>
 
 <file path=ppt/slideLayouts/slideLayout11.xml><?xml version="1.0" encoding="utf-8"?>
-<p:sldLayout xmlns:a="http://schemas.openxmlformats.org/drawingml/2006/main" xmlns:p="http://schemas.openxmlformats.org/presentationml/2006/main" type="vertTitleAndTx" preserve="1">
+<p:sldLayout xmlns:a="http://schemas.openxmlformats.org/drawingml/2006/main" xmlns:r="http://schemas.openxmlformats.org/officeDocument/2006/relationships" xmlns:p="http://schemas.openxmlformats.org/presentationml/2006/main" type="vertTitleAndTx" preserve="1">
   <p:cSld name="Vertical Title and Text">
     <p:spTree>
       <p:nvGrpSpPr>
@@ -256,11 +292,20 @@
             <p:ph type="title"/>
           </p:nvPr>
         </p:nvSpPr>
-        <p:spPr/>
-        <p:txBody>
-          <a:bodyPr/>
-          <a:lstStyle/>
-          <a:p>
+        <p:spPr>
+          <a:xfrm>
+            <a:off x="685800" y="2130425"/>
+            <a:ext cx="7772400" cy="1470025"/>
+          </a:xfrm>
+        </p:spPr>
+        <p:txBody>
+          <a:bodyPr/>
+          <a:lstStyle/>
+          <a:p>
+            <a:r>
+              <a:rPr lang="en-US" smtClean="0"/>
+              <a:t>Click to edit Master title style</a:t>
+            </a:r>
             <a:endParaRPr lang="en-US"/>
           </a:p>
         </p:txBody>
@@ -275,11 +320,20 @@
             <p:ph type="body" idx="1"/>
           </p:nvPr>
         </p:nvSpPr>
-        <p:spPr/>
-        <p:txBody>
-          <a:bodyPr/>
-          <a:lstStyle/>
-          <a:p>
+        <p:spPr>
+          <a:xfrm>
+            <a:off x="457200" y="1600200"/>
+            <a:ext cx="8229600" cy="4525963"/>
+          </a:xfrm>
+        </p:spPr>
+        <p:txBody>
+          <a:bodyPr/>
+          <a:lstStyle/>
+          <a:p>
+            <a:r>
+              <a:rPr lang="en-US" smtClean="0"/>
+              <a:t>Click to edit Master text styles</a:t>
+            </a:r>
             <a:endParaRPr lang="en-US"/>
           </a:p>
         </p:txBody>
@@ -290,7 +344,7 @@
 </file>
 
 <file path=ppt/slideLayouts/slideLayout2.xml><?xml version="1.0" encoding="utf-8"?>
-<p:sldLayout xmlns:a="http://schemas.openxmlformats.org/drawingml/2006/main" xmlns:p="http://schemas.openxmlformats.org/presentationml/2006/main" type="obj" preserve="1">
+<p:sldLayout xmlns:a="http://schemas.openxmlformats.org/drawingml/2006/main" xmlns:r="http://schemas.openxmlformats.org/officeDocument/2006/relationships" xmlns:p="http://schemas.openxmlformats.org/presentationml/2006/main" type="obj" preserve="1">
   <p:cSld name="Title and Content">
     <p:spTree>
       <p:nvGrpSpPr>
@@ -316,11 +370,20 @@
             <p:ph type="title"/>
           </p:nvPr>
         </p:nvSpPr>
-        <p:spPr/>
-        <p:txBody>
-          <a:bodyPr/>
-          <a:lstStyle/>
-          <a:p>
+        <p:spPr>
+          <a:xfrm>
+            <a:off x="685800" y="2130425"/>
+            <a:ext cx="7772400" cy="1470025"/>
+          </a:xfrm>
+        </p:spPr>
+        <p:txBody>
+          <a:bodyPr/>
+          <a:lstStyle/>
+          <a:p>
+            <a:r>
+              <a:rPr lang="en-US" smtClean="0"/>
+              <a:t>Click to edit Master title style</a:t>
+            </a:r>
             <a:endParaRPr lang="en-US"/>
           </a:p>
         </p:txBody>
@@ -335,11 +398,20 @@
             <p:ph type="body" idx="1"/>
           </p:nvPr>
         </p:nvSpPr>
-        <p:spPr/>
-        <p:txBody>
-          <a:bodyPr/>
-          <a:lstStyle/>
-          <a:p>
+        <p:spPr>
+          <a:xfrm>
+            <a:off x="457200" y="1600200"/>
+            <a:ext cx="8229600" cy="4525963"/>
+          </a:xfrm>
+        </p:spPr>
+        <p:txBody>
+          <a:bodyPr/>
+          <a:lstStyle/>
+          <a:p>
+            <a:r>
+              <a:rPr lang="en-US" smtClean="0"/>
+              <a:t>Click to edit Master text styles</a:t>
+            </a:r>
             <a:endParaRPr lang="en-US"/>
           </a:p>
         </p:txBody>
@@ -350,7 +422,7 @@
 </file>
 
 <file path=ppt/slideLayouts/slideLayout3.xml><?xml version="1.0" encoding="utf-8"?>
-<p:sldLayout xmlns:a="http://schemas.openxmlformats.org/drawingml/2006/main" xmlns:p="http://schemas.openxmlformats.org/presentationml/2006/main" type="secHead" preserve="1">
+<p:sldLayout xmlns:a="http://schemas.openxmlformats.org/drawingml/2006/main" xmlns:r="http://schemas.openxmlformats.org/officeDocument/2006/relationships" xmlns:p="http://schemas.openxmlformats.org/presentationml/2006/main" type="secHead" preserve="1">
   <p:cSld name="Section Header">
     <p:spTree>
       <p:nvGrpSpPr>
@@ -376,11 +448,20 @@
             <p:ph type="title"/>
           </p:nvPr>
         </p:nvSpPr>
-        <p:spPr/>
-        <p:txBody>
-          <a:bodyPr/>
-          <a:lstStyle/>
-          <a:p>
+        <p:spPr>
+          <a:xfrm>
+            <a:off x="685800" y="2130425"/>
+            <a:ext cx="7772400" cy="1470025"/>
+          </a:xfrm>
+        </p:spPr>
+        <p:txBody>
+          <a:bodyPr/>
+          <a:lstStyle/>
+          <a:p>
+            <a:r>
+              <a:rPr lang="en-US" smtClean="0"/>
+              <a:t>Click to edit Master title style</a:t>
+            </a:r>
             <a:endParaRPr lang="en-US"/>
           </a:p>
         </p:txBody>
@@ -395,11 +476,20 @@
             <p:ph type="body" idx="1"/>
           </p:nvPr>
         </p:nvSpPr>
-        <p:spPr/>
-        <p:txBody>
-          <a:bodyPr/>
-          <a:lstStyle/>
-          <a:p>
+        <p:spPr>
+          <a:xfrm>
+            <a:off x="457200" y="1600200"/>
+            <a:ext cx="8229600" cy="4525963"/>
+          </a:xfrm>
+        </p:spPr>
+        <p:txBody>
+          <a:bodyPr/>
+          <a:lstStyle/>
+          <a:p>
+            <a:r>
+              <a:rPr lang="en-US" smtClean="0"/>
+              <a:t>Click to edit Master text styles</a:t>
+            </a:r>
             <a:endParaRPr lang="en-US"/>
           </a:p>
         </p:txBody>
@@ -410,7 +500,7 @@
 </file>
 
 <file path=ppt/slideLayouts/slideLayout4.xml><?xml version="1.0" encoding="utf-8"?>
-<p:sldLayout xmlns:a="http://schemas.openxmlformats.org/drawingml/2006/main" xmlns:p="http://schemas.openxmlformats.org/presentationml/2006/main" type="twoObj" preserve="1">
+<p:sldLayout xmlns:a="http://schemas.openxmlformats.org/drawingml/2006/main" xmlns:r="http://schemas.openxmlformats.org/officeDocument/2006/relationships" xmlns:p="http://schemas.openxmlformats.org/presentationml/2006/main" type="twoObj" preserve="1">
   <p:cSld name="Two Content">
     <p:spTree>
       <p:nvGrpSpPr>
@@ -436,11 +526,20 @@
             <p:ph type="title"/>
           </p:nvPr>
         </p:nvSpPr>
-        <p:spPr/>
-        <p:txBody>
-          <a:bodyPr/>
-          <a:lstStyle/>
-          <a:p>
+        <p:spPr>
+          <a:xfrm>
+            <a:off x="685800" y="2130425"/>
+            <a:ext cx="7772400" cy="1470025"/>
+          </a:xfrm>
+        </p:spPr>
+        <p:txBody>
+          <a:bodyPr/>
+          <a:lstStyle/>
+          <a:p>
+            <a:r>
+              <a:rPr lang="en-US" smtClean="0"/>
+              <a:t>Click to edit Master title style</a:t>
+            </a:r>
             <a:endParaRPr lang="en-US"/>
           </a:p>
         </p:txBody>
@@ -455,11 +554,20 @@
             <p:ph type="body" idx="1"/>
           </p:nvPr>
         </p:nvSpPr>
-        <p:spPr/>
-        <p:txBody>
-          <a:bodyPr/>
-          <a:lstStyle/>
-          <a:p>
+        <p:spPr>
+          <a:xfrm>
+            <a:off x="457200" y="1600200"/>
+            <a:ext cx="8229600" cy="4525963"/>
+          </a:xfrm>
+        </p:spPr>
+        <p:txBody>
+          <a:bodyPr/>
+          <a:lstStyle/>
+          <a:p>
+            <a:r>
+              <a:rPr lang="en-US" smtClean="0"/>
+              <a:t>Click to edit Master text styles</a:t>
+            </a:r>
             <a:endParaRPr lang="en-US"/>
           </a:p>
         </p:txBody>
@@ -474,11 +582,20 @@
             <p:ph type="body" idx="2"/>
           </p:nvPr>
         </p:nvSpPr>
-        <p:spPr/>
-        <p:txBody>
-          <a:bodyPr/>
-          <a:lstStyle/>
-          <a:p>
+        <p:spPr>
+          <a:xfrm>
+            <a:off x="457200" y="1600200"/>
+            <a:ext cx="8229600" cy="4525963"/>
+          </a:xfrm>
+        </p:spPr>
+        <p:txBody>
+          <a:bodyPr/>
+          <a:lstStyle/>
+          <a:p>
+            <a:r>
+              <a:rPr lang="en-US" smtClean="0"/>
+              <a:t>Click to edit Master text styles</a:t>
+            </a:r>
             <a:endParaRPr lang="en-US"/>
           </a:p>
         </p:txBody>
@@ -489,7 +606,7 @@
 </file>
 
 <file path=ppt/slideLayouts/slideLayout5.xml><?xml version="1.0" encoding="utf-8"?>
-<p:sldLayout xmlns:a="http://schemas.openxmlformats.org/drawingml/2006/main" xmlns:p="http://schemas.openxmlformats.org/presentationml/2006/main" type="twoTxTwoObj" preserve="1">
+<p:sldLayout xmlns:a="http://schemas.openxmlformats.org/drawingml/2006/main" xmlns:r="http://schemas.openxmlformats.org/officeDocument/2006/relationships" xmlns:p="http://schemas.openxmlformats.org/presentationml/2006/main" type="twoTxTwoObj" preserve="1">
   <p:cSld name="Comparison">
     <p:spTree>
       <p:nvGrpSpPr>
@@ -515,11 +632,20 @@
             <p:ph type="title"/>
           </p:nvPr>
         </p:nvSpPr>
-        <p:spPr/>
-        <p:txBody>
-          <a:bodyPr/>
-          <a:lstStyle/>
-          <a:p>
+        <p:spPr>
+          <a:xfrm>
+            <a:off x="685800" y="2130425"/>
+            <a:ext cx="7772400" cy="1470025"/>
+          </a:xfrm>
+        </p:spPr>
+        <p:txBody>
+          <a:bodyPr/>
+          <a:lstStyle/>
+          <a:p>
+            <a:r>
+              <a:rPr lang="en-US" smtClean="0"/>
+              <a:t>Click to edit Master title style</a:t>
+            </a:r>
             <a:endParaRPr lang="en-US"/>
           </a:p>
         </p:txBody>
@@ -534,11 +660,20 @@
             <p:ph type="body" idx="1"/>
           </p:nvPr>
         </p:nvSpPr>
-        <p:spPr/>
-        <p:txBody>
-          <a:bodyPr/>
-          <a:lstStyle/>
-          <a:p>
+        <p:spPr>
+          <a:xfrm>
+            <a:off x="457200" y="1600200"/>
+            <a:ext cx="8229600" cy="4525963"/>
+          </a:xfrm>
+        </p:spPr>
+        <p:txBody>
+          <a:bodyPr/>
+          <a:lstStyle/>
+          <a:p>
+            <a:r>
+              <a:rPr lang="en-US" smtClean="0"/>
+              <a:t>Click to edit Master text styles</a:t>
+            </a:r>
             <a:endParaRPr lang="en-US"/>
           </a:p>
         </p:txBody>
@@ -553,11 +688,20 @@
             <p:ph type="body" idx="2"/>
           </p:nvPr>
         </p:nvSpPr>
-        <p:spPr/>
-        <p:txBody>
-          <a:bodyPr/>
-          <a:lstStyle/>
-          <a:p>
+        <p:spPr>
+          <a:xfrm>
+            <a:off x="457200" y="1600200"/>
+            <a:ext cx="8229600" cy="4525963"/>
+          </a:xfrm>
+        </p:spPr>
+        <p:txBody>
+          <a:bodyPr/>
+          <a:lstStyle/>
+          <a:p>
+            <a:r>
+              <a:rPr lang="en-US" smtClean="0"/>
+              <a:t>Click to edit Master text styles</a:t>
+            </a:r>
             <a:endParaRPr lang="en-US"/>
           </a:p>
         </p:txBody>
@@ -568,7 +712,7 @@
 </file>
 
 <file path=ppt/slideLayouts/slideLayout6.xml><?xml version="1.0" encoding="utf-8"?>
-<p:sldLayout xmlns:a="http://schemas.openxmlformats.org/drawingml/2006/main" xmlns:p="http://schemas.openxmlformats.org/presentationml/2006/main" type="titleOnly" preserve="1">
+<p:sldLayout xmlns:a="http://schemas.openxmlformats.org/drawingml/2006/main" xmlns:r="http://schemas.openxmlformats.org/officeDocument/2006/relationships" xmlns:p="http://schemas.openxmlformats.org/presentationml/2006/main" type="titleOnly" preserve="1">
   <p:cSld name="Title Only">
     <p:spTree>
       <p:nvGrpSpPr>
@@ -594,11 +738,20 @@
             <p:ph type="title"/>
           </p:nvPr>
         </p:nvSpPr>
-        <p:spPr/>
-        <p:txBody>
-          <a:bodyPr/>
-          <a:lstStyle/>
-          <a:p>
+        <p:spPr>
+          <a:xfrm>
+            <a:off x="685800" y="2130425"/>
+            <a:ext cx="7772400" cy="1470025"/>
+          </a:xfrm>
+        </p:spPr>
+        <p:txBody>
+          <a:bodyPr/>
+          <a:lstStyle/>
+          <a:p>
+            <a:r>
+              <a:rPr lang="en-US" smtClean="0"/>
+              <a:t>Click to edit Master title style</a:t>
+            </a:r>
             <a:endParaRPr lang="en-US"/>
           </a:p>
         </p:txBody>
@@ -609,7 +762,7 @@
 </file>
 
 <file path=ppt/slideLayouts/slideLayout7.xml><?xml version="1.0" encoding="utf-8"?>
-<p:sldLayout xmlns:a="http://schemas.openxmlformats.org/drawingml/2006/main" xmlns:p="http://schemas.openxmlformats.org/presentationml/2006/main" type="blank" preserve="1">
+<p:sldLayout xmlns:a="http://schemas.openxmlformats.org/drawingml/2006/main" xmlns:r="http://schemas.openxmlformats.org/officeDocument/2006/relationships" xmlns:p="http://schemas.openxmlformats.org/presentationml/2006/main" type="blank" preserve="1">
   <p:cSld name="Blank">
     <p:spTree>
       <p:nvGrpSpPr>
@@ -631,7 +784,7 @@
 </file>
 
 <file path=ppt/slideLayouts/slideLayout8.xml><?xml version="1.0" encoding="utf-8"?>
-<p:sldLayout xmlns:a="http://schemas.openxmlformats.org/drawingml/2006/main" xmlns:p="http://schemas.openxmlformats.org/presentationml/2006/main" type="objTx" preserve="1">
+<p:sldLayout xmlns:a="http://schemas.openxmlformats.org/drawingml/2006/main" xmlns:r="http://schemas.openxmlformats.org/officeDocument/2006/relationships" xmlns:p="http://schemas.openxmlformats.org/presentationml/2006/main" type="objTx" preserve="1">
   <p:cSld name="Content with Caption">
     <p:spTree>
       <p:nvGrpSpPr>
@@ -657,11 +810,20 @@
             <p:ph type="title"/>
           </p:nvPr>
         </p:nvSpPr>
-        <p:spPr/>
-        <p:txBody>
-          <a:bodyPr/>
-          <a:lstStyle/>
-          <a:p>
+        <p:spPr>
+          <a:xfrm>
+            <a:off x="685800" y="2130425"/>
+            <a:ext cx="7772400" cy="1470025"/>
+          </a:xfrm>
+        </p:spPr>
+        <p:txBody>
+          <a:bodyPr/>
+          <a:lstStyle/>
+          <a:p>
+            <a:r>
+              <a:rPr lang="en-US" smtClean="0"/>
+              <a:t>Click to edit Master title style</a:t>
+            </a:r>
             <a:endParaRPr lang="en-US"/>
           </a:p>
         </p:txBody>
@@ -676,11 +838,20 @@
             <p:ph type="body" idx="1"/>
           </p:nvPr>
         </p:nvSpPr>
-        <p:spPr/>
-        <p:txBody>
-          <a:bodyPr/>
-          <a:lstStyle/>
-          <a:p>
+        <p:spPr>
+          <a:xfrm>
+            <a:off x="457200" y="1600200"/>
+            <a:ext cx="8229600" cy="4525963"/>
+          </a:xfrm>
+        </p:spPr>
+        <p:txBody>
+          <a:bodyPr/>
+          <a:lstStyle/>
+          <a:p>
+            <a:r>
+              <a:rPr lang="en-US" smtClean="0"/>
+              <a:t>Click to edit Master text styles</a:t>
+            </a:r>
             <a:endParaRPr lang="en-US"/>
           </a:p>
         </p:txBody>
@@ -691,7 +862,7 @@
 </file>
 
 <file path=ppt/slideLayouts/slideLayout9.xml><?xml version="1.0" encoding="utf-8"?>
-<p:sldLayout xmlns:a="http://schemas.openxmlformats.org/drawingml/2006/main" xmlns:p="http://schemas.openxmlformats.org/presentationml/2006/main" type="picTx" preserve="1">
+<p:sldLayout xmlns:a="http://schemas.openxmlformats.org/drawingml/2006/main" xmlns:r="http://schemas.openxmlformats.org/officeDocument/2006/relationships" xmlns:p="http://schemas.openxmlformats.org/presentationml/2006/main" type="picTx" preserve="1">
   <p:cSld name="Picture with Caption">
     <p:spTree>
       <p:nvGrpSpPr>
@@ -717,11 +888,20 @@
             <p:ph type="title"/>
           </p:nvPr>
         </p:nvSpPr>
-        <p:spPr/>
-        <p:txBody>
-          <a:bodyPr/>
-          <a:lstStyle/>
-          <a:p>
+        <p:spPr>
+          <a:xfrm>
+            <a:off x="685800" y="2130425"/>
+            <a:ext cx="7772400" cy="1470025"/>
+          </a:xfrm>
+        </p:spPr>
+        <p:txBody>
+          <a:bodyPr/>
+          <a:lstStyle/>
+          <a:p>
+            <a:r>
+              <a:rPr lang="en-US" smtClean="0"/>
+              <a:t>Click to edit Master title style</a:t>
+            </a:r>
             <a:endParaRPr lang="en-US"/>
           </a:p>
         </p:txBody>
@@ -736,11 +916,20 @@
             <p:ph type="body" idx="1"/>
           </p:nvPr>
         </p:nvSpPr>
-        <p:spPr/>
-        <p:txBody>
-          <a:bodyPr/>
-          <a:lstStyle/>
-          <a:p>
+        <p:spPr>
+          <a:xfrm>
+            <a:off x="457200" y="1600200"/>
+            <a:ext cx="8229600" cy="4525963"/>
+          </a:xfrm>
+        </p:spPr>
+        <p:txBody>
+          <a:bodyPr/>
+          <a:lstStyle/>
+          <a:p>
+            <a:r>
+              <a:rPr lang="en-US" smtClean="0"/>
+              <a:t>Click to edit Master text styles</a:t>
+            </a:r>
             <a:endParaRPr lang="en-US"/>
           </a:p>
         </p:txBody>
